--- a/Ainedembe Denis - Presentation.pptx
+++ b/Ainedembe Denis - Presentation.pptx
@@ -354,7 +354,7 @@
             <a:fld id="{1CE781C4-521A-45E9-A784-B690473DD751}" type="datetime1">
               <a:rPr lang="en-US" altLang="en-UG"/>
               <a:pPr/>
-              <a:t>3/4/2026</a:t>
+              <a:t>3/6/2026</a:t>
             </a:fld>
             <a:endParaRPr lang="en-US" altLang="en-UG"/>
           </a:p>
@@ -517,6 +517,11 @@
         </p:txBody>
       </p:sp>
     </p:spTree>
+    <p:extLst>
+      <p:ext uri="{BB962C8B-B14F-4D97-AF65-F5344CB8AC3E}">
+        <p14:creationId xmlns:p14="http://schemas.microsoft.com/office/powerpoint/2010/main" val="1"/>
+      </p:ext>
+    </p:extLst>
   </p:cSld>
   <p:clrMap bg1="lt1" tx1="dk1" bg2="lt2" tx2="dk2" accent1="accent1" accent2="accent2" accent3="accent3" accent4="accent4" accent5="accent5" accent6="accent6" hlink="hlink" folHlink="folHlink"/>
 </p:handoutMaster>
@@ -697,7 +702,7 @@
             <a:fld id="{F8D15F8F-DE68-4220-8EBC-E74FA7986C26}" type="datetime1">
               <a:rPr lang="en-US" altLang="en-UG"/>
               <a:pPr/>
-              <a:t>3/4/2026</a:t>
+              <a:t>3/6/2026</a:t>
             </a:fld>
             <a:endParaRPr lang="en-US" altLang="en-UG"/>
           </a:p>
@@ -713,7 +718,7 @@
             </a:extLst>
           </p:cNvPr>
           <p:cNvSpPr>
-            <a:spLocks noChangeArrowheads="1" noTextEdit="1"/>
+            <a:spLocks noGrp="1" noRot="1" noChangeAspect="1" noChangeArrowheads="1" noTextEdit="1"/>
           </p:cNvSpPr>
           <p:nvPr>
             <p:ph type="sldImg" idx="2"/>
@@ -1213,7 +1218,7 @@
             <a:fld id="{BE404601-5409-4916-ACC5-631589FF7894}" type="datetime1">
               <a:rPr lang="en-US" altLang="en-UG"/>
               <a:pPr/>
-              <a:t>3/4/2026</a:t>
+              <a:t>3/6/2026</a:t>
             </a:fld>
             <a:endParaRPr lang="en-US" altLang="en-UG"/>
           </a:p>
@@ -1291,7 +1296,7 @@
             </a:extLst>
           </p:cNvPr>
           <p:cNvSpPr>
-            <a:spLocks noChangeArrowheads="1" noTextEdit="1"/>
+            <a:spLocks noGrp="1" noRot="1" noChangeAspect="1" noChangeArrowheads="1" noTextEdit="1"/>
           </p:cNvSpPr>
           <p:nvPr>
             <p:ph type="sldImg"/>
@@ -1413,7 +1418,7 @@
             <a:fld id="{BE404601-5409-4916-ACC5-631589FF7894}" type="datetime1">
               <a:rPr lang="en-US" altLang="en-UG"/>
               <a:pPr/>
-              <a:t>3/4/2026</a:t>
+              <a:t>3/6/2026</a:t>
             </a:fld>
             <a:endParaRPr lang="en-US" altLang="en-UG"/>
           </a:p>
@@ -1491,7 +1496,7 @@
             </a:extLst>
           </p:cNvPr>
           <p:cNvSpPr>
-            <a:spLocks noChangeArrowheads="1" noTextEdit="1"/>
+            <a:spLocks noGrp="1" noRot="1" noChangeAspect="1" noChangeArrowheads="1" noTextEdit="1"/>
           </p:cNvSpPr>
           <p:nvPr>
             <p:ph type="sldImg"/>
@@ -1618,7 +1623,7 @@
             <a:fld id="{BE404601-5409-4916-ACC5-631589FF7894}" type="datetime1">
               <a:rPr lang="en-US" altLang="en-UG"/>
               <a:pPr/>
-              <a:t>3/4/2026</a:t>
+              <a:t>3/6/2026</a:t>
             </a:fld>
             <a:endParaRPr lang="en-US" altLang="en-UG"/>
           </a:p>
@@ -1696,7 +1701,7 @@
             </a:extLst>
           </p:cNvPr>
           <p:cNvSpPr>
-            <a:spLocks noChangeArrowheads="1" noTextEdit="1"/>
+            <a:spLocks noGrp="1" noRot="1" noChangeAspect="1" noChangeArrowheads="1" noTextEdit="1"/>
           </p:cNvSpPr>
           <p:nvPr>
             <p:ph type="sldImg"/>
@@ -8331,8 +8336,8 @@
         </p:blipFill>
         <p:spPr>
           <a:xfrm>
-            <a:off x="2453640" y="3884617"/>
-            <a:ext cx="6370318" cy="2336789"/>
+            <a:off x="2133600" y="3884617"/>
+            <a:ext cx="6690358" cy="2336789"/>
           </a:xfrm>
           <a:prstGeom prst="rect">
             <a:avLst/>
@@ -8355,7 +8360,7 @@
         </p:nvSpPr>
         <p:spPr bwMode="auto">
           <a:xfrm>
-            <a:off x="780733" y="4569616"/>
+            <a:off x="333376" y="4569616"/>
             <a:ext cx="1677987" cy="966790"/>
           </a:xfrm>
           <a:prstGeom prst="rect">
@@ -9679,7 +9684,7 @@
           <a:p>
             <a:r>
               <a:rPr lang="en-US" dirty="0"/>
-              <a:t>Checks</a:t>
+              <a:t>Checks / Controls</a:t>
             </a:r>
             <a:endParaRPr lang="en-UG" dirty="0"/>
           </a:p>
@@ -10893,24 +10898,201 @@
         </p:nvSpPr>
         <p:spPr>
           <a:xfrm>
-            <a:off x="1143001" y="2907506"/>
-            <a:ext cx="7086600" cy="3188494"/>
+            <a:off x="1143000" y="2743200"/>
+            <a:ext cx="7315200" cy="3505200"/>
           </a:xfrm>
         </p:spPr>
         <p:txBody>
           <a:bodyPr/>
           <a:lstStyle/>
           <a:p>
-            <a:pPr marL="0" indent="0" algn="just">
-              <a:buNone/>
-            </a:pPr>
-            <a:endParaRPr lang="en-US" altLang="en-UG" sz="2500" dirty="0">
+            <a:pPr indent="-650875" algn="just"/>
+            <a:r>
+              <a:rPr lang="en-US" altLang="en-UG" sz="1800" dirty="0">
+                <a:effectLst>
+                  <a:outerShdw blurRad="38100" dist="38100" dir="2700000" algn="tl">
+                    <a:srgbClr val="000000"/>
+                  </a:outerShdw>
+                </a:effectLst>
+              </a:rPr>
+              <a:t>This program calculates the Monthly Loan EMI (Equated Monthly Installment).</a:t>
+            </a:r>
+          </a:p>
+          <a:p>
+            <a:pPr indent="-650875" algn="just"/>
+            <a:endParaRPr lang="en-US" altLang="en-UG" sz="1800" dirty="0">
               <a:effectLst>
                 <a:outerShdw blurRad="38100" dist="38100" dir="2700000" algn="tl">
                   <a:srgbClr val="000000"/>
                 </a:outerShdw>
               </a:effectLst>
             </a:endParaRPr>
+          </a:p>
+          <a:p>
+            <a:pPr indent="-650875" algn="just"/>
+            <a:r>
+              <a:rPr lang="en-US" altLang="en-UG" sz="1800" dirty="0">
+                <a:effectLst>
+                  <a:outerShdw blurRad="38100" dist="38100" dir="2700000" algn="tl">
+                    <a:srgbClr val="000000"/>
+                  </a:outerShdw>
+                </a:effectLst>
+              </a:rPr>
+              <a:t>The program converts the annual interest rate to a monthly interest rate.</a:t>
+            </a:r>
+          </a:p>
+          <a:p>
+            <a:pPr indent="-650875" algn="just"/>
+            <a:endParaRPr lang="en-US" altLang="en-UG" sz="1800" dirty="0">
+              <a:effectLst>
+                <a:outerShdw blurRad="38100" dist="38100" dir="2700000" algn="tl">
+                  <a:srgbClr val="000000"/>
+                </a:outerShdw>
+              </a:effectLst>
+            </a:endParaRPr>
+          </a:p>
+          <a:p>
+            <a:pPr indent="-650875" algn="just"/>
+            <a:r>
+              <a:rPr lang="en-US" altLang="en-UG" sz="1800" dirty="0">
+                <a:effectLst>
+                  <a:outerShdw blurRad="38100" dist="38100" dir="2700000" algn="tl">
+                    <a:srgbClr val="000000"/>
+                  </a:outerShdw>
+                </a:effectLst>
+              </a:rPr>
+              <a:t>It then uses the EMI formula to compute the monthly payment and then checks loan eligibility.</a:t>
+            </a:r>
+          </a:p>
+          <a:p>
+            <a:pPr marL="263525" indent="0" algn="just">
+              <a:buNone/>
+            </a:pPr>
+            <a:r>
+              <a:rPr lang="pt-BR" altLang="en-UG" sz="1800" dirty="0">
+                <a:effectLst>
+                  <a:outerShdw blurRad="38100" dist="38100" dir="2700000" algn="tl">
+                    <a:srgbClr val="000000"/>
+                  </a:outerShdw>
+                </a:effectLst>
+              </a:rPr>
+              <a:t>            EMI = </a:t>
+            </a:r>
+            <a:r>
+              <a:rPr lang="pt-BR" altLang="en-UG" sz="1800" dirty="0">
+                <a:solidFill>
+                  <a:srgbClr val="00B050"/>
+                </a:solidFill>
+                <a:effectLst>
+                  <a:outerShdw blurRad="38100" dist="38100" dir="2700000" algn="tl">
+                    <a:srgbClr val="000000"/>
+                  </a:outerShdw>
+                </a:effectLst>
+              </a:rPr>
+              <a:t>[</a:t>
+            </a:r>
+            <a:r>
+              <a:rPr lang="pt-BR" altLang="en-UG" sz="1800" dirty="0">
+                <a:effectLst>
+                  <a:outerShdw blurRad="38100" dist="38100" dir="2700000" algn="tl">
+                    <a:srgbClr val="000000"/>
+                  </a:outerShdw>
+                </a:effectLst>
+              </a:rPr>
+              <a:t>P x R x (1+R)^N</a:t>
+            </a:r>
+            <a:r>
+              <a:rPr lang="pt-BR" altLang="en-UG" sz="1800" dirty="0">
+                <a:solidFill>
+                  <a:srgbClr val="00B050"/>
+                </a:solidFill>
+                <a:effectLst>
+                  <a:outerShdw blurRad="38100" dist="38100" dir="2700000" algn="tl">
+                    <a:srgbClr val="000000"/>
+                  </a:outerShdw>
+                </a:effectLst>
+              </a:rPr>
+              <a:t>]</a:t>
+            </a:r>
+            <a:r>
+              <a:rPr lang="pt-BR" altLang="en-UG" sz="1800" dirty="0">
+                <a:effectLst>
+                  <a:outerShdw blurRad="38100" dist="38100" dir="2700000" algn="tl">
+                    <a:srgbClr val="000000"/>
+                  </a:outerShdw>
+                </a:effectLst>
+              </a:rPr>
+              <a:t> / </a:t>
+            </a:r>
+            <a:r>
+              <a:rPr lang="pt-BR" altLang="en-UG" sz="1800" dirty="0">
+                <a:solidFill>
+                  <a:srgbClr val="00B050"/>
+                </a:solidFill>
+                <a:effectLst>
+                  <a:outerShdw blurRad="38100" dist="38100" dir="2700000" algn="tl">
+                    <a:srgbClr val="000000"/>
+                  </a:outerShdw>
+                </a:effectLst>
+              </a:rPr>
+              <a:t>[</a:t>
+            </a:r>
+            <a:r>
+              <a:rPr lang="pt-BR" altLang="en-UG" sz="1800" dirty="0">
+                <a:effectLst>
+                  <a:outerShdw blurRad="38100" dist="38100" dir="2700000" algn="tl">
+                    <a:srgbClr val="000000"/>
+                  </a:outerShdw>
+                </a:effectLst>
+              </a:rPr>
+              <a:t>(1+R)^N - 1</a:t>
+            </a:r>
+            <a:r>
+              <a:rPr lang="pt-BR" altLang="en-UG" sz="1800" dirty="0">
+                <a:solidFill>
+                  <a:srgbClr val="00B050"/>
+                </a:solidFill>
+                <a:effectLst>
+                  <a:outerShdw blurRad="38100" dist="38100" dir="2700000" algn="tl">
+                    <a:srgbClr val="000000"/>
+                  </a:outerShdw>
+                </a:effectLst>
+              </a:rPr>
+              <a:t>]</a:t>
+            </a:r>
+            <a:endParaRPr lang="en-US" altLang="en-UG" sz="1800" dirty="0">
+              <a:solidFill>
+                <a:srgbClr val="00B050"/>
+              </a:solidFill>
+              <a:effectLst>
+                <a:outerShdw blurRad="38100" dist="38100" dir="2700000" algn="tl">
+                  <a:srgbClr val="000000"/>
+                </a:outerShdw>
+              </a:effectLst>
+            </a:endParaRPr>
+          </a:p>
+          <a:p>
+            <a:pPr indent="-650875" algn="just"/>
+            <a:endParaRPr lang="en-US" altLang="en-UG" sz="1800" dirty="0">
+              <a:effectLst>
+                <a:outerShdw blurRad="38100" dist="38100" dir="2700000" algn="tl">
+                  <a:srgbClr val="000000"/>
+                </a:outerShdw>
+              </a:effectLst>
+            </a:endParaRPr>
+          </a:p>
+          <a:p>
+            <a:pPr indent="-650875" algn="just"/>
+            <a:r>
+              <a:rPr lang="en-US" altLang="en-UG" sz="1800" dirty="0">
+                <a:effectLst>
+                  <a:outerShdw blurRad="38100" dist="38100" dir="2700000" algn="tl">
+                    <a:srgbClr val="000000"/>
+                  </a:outerShdw>
+                </a:effectLst>
+              </a:rPr>
+              <a:t>A person is eligible for the loan only if the EMI is less than or equal to 40% of their monthly salary.</a:t>
+            </a:r>
           </a:p>
         </p:txBody>
       </p:sp>

--- a/Ainedembe Denis - Presentation.pptx
+++ b/Ainedembe Denis - Presentation.pptx
@@ -5,10 +5,10 @@
     <p:sldMasterId id="2147483661" r:id="rId1"/>
   </p:sldMasterIdLst>
   <p:notesMasterIdLst>
-    <p:notesMasterId r:id="rId34"/>
+    <p:notesMasterId r:id="rId35"/>
   </p:notesMasterIdLst>
   <p:handoutMasterIdLst>
-    <p:handoutMasterId r:id="rId35"/>
+    <p:handoutMasterId r:id="rId36"/>
   </p:handoutMasterIdLst>
   <p:sldIdLst>
     <p:sldId id="256" r:id="rId2"/>
@@ -43,16 +43,17 @@
     <p:sldId id="316" r:id="rId31"/>
     <p:sldId id="317" r:id="rId32"/>
     <p:sldId id="318" r:id="rId33"/>
+    <p:sldId id="319" r:id="rId34"/>
   </p:sldIdLst>
   <p:sldSz cx="9144000" cy="6858000" type="screen4x3"/>
   <p:notesSz cx="6858000" cy="9144000"/>
   <p:embeddedFontLst>
     <p:embeddedFont>
       <p:font typeface="Arial Narrow" panose="020B0606020202030204" pitchFamily="34" charset="0"/>
-      <p:regular r:id="rId36"/>
-      <p:bold r:id="rId37"/>
-      <p:italic r:id="rId38"/>
-      <p:boldItalic r:id="rId39"/>
+      <p:regular r:id="rId37"/>
+      <p:bold r:id="rId38"/>
+      <p:italic r:id="rId39"/>
+      <p:boldItalic r:id="rId40"/>
     </p:embeddedFont>
   </p:embeddedFontLst>
   <p:defaultTextStyle>
@@ -3078,7 +3079,7 @@
           <a:p>
             <a:pPr algn="r"/>
             <a:r>
-              <a:rPr lang="en-US" altLang="en-UG" sz="1500" dirty="0">
+              <a:rPr lang="en-US" altLang="en-UG" sz="1800" dirty="0">
                 <a:solidFill>
                   <a:srgbClr val="E0EDF0"/>
                 </a:solidFill>
@@ -3339,20 +3340,16 @@
           <a:bodyPr/>
           <a:lstStyle>
             <a:lvl1pPr>
-              <a:defRPr sz="1600"/>
+              <a:defRPr sz="1800"/>
             </a:lvl1pPr>
           </a:lstStyle>
           <a:p>
             <a:r>
               <a:rPr lang="en-US" altLang="en-UG" dirty="0"/>
-              <a:t>  </a:t>
-            </a:r>
-            <a:r>
-              <a:rPr lang="en-US" altLang="en-UG" sz="1500" dirty="0"/>
-              <a:t>Slide</a:t>
-            </a:r>
-            <a:r>
-              <a:rPr lang="en-US" altLang="en-UG" sz="1500" b="1" dirty="0">
+              <a:t>  Slide</a:t>
+            </a:r>
+            <a:r>
+              <a:rPr lang="en-US" altLang="en-UG" b="1" dirty="0">
                 <a:effectLst>
                   <a:outerShdw blurRad="38100" dist="38100" dir="2700000" algn="tl">
                     <a:srgbClr val="FFFFFF"/>
@@ -3362,11 +3359,11 @@
               <a:t> </a:t>
             </a:r>
             <a:fld id="{E9713479-D2C5-48C2-AEF2-300D23B2E6DD}" type="slidenum">
-              <a:rPr lang="en-US" altLang="en-UG" sz="1500" smtClean="0"/>
+              <a:rPr lang="en-US" altLang="en-UG" smtClean="0"/>
               <a:pPr/>
               <a:t>‹#›</a:t>
             </a:fld>
-            <a:endParaRPr lang="en-US" altLang="en-UG" sz="1500" dirty="0"/>
+            <a:endParaRPr lang="en-US" altLang="en-UG" sz="1800" dirty="0"/>
           </a:p>
         </p:txBody>
       </p:sp>
@@ -3965,16 +3962,16 @@
           <a:bodyPr/>
           <a:lstStyle>
             <a:lvl1pPr>
-              <a:defRPr/>
+              <a:defRPr sz="1800"/>
             </a:lvl1pPr>
           </a:lstStyle>
           <a:p>
             <a:r>
-              <a:rPr lang="en-US" altLang="en-UG"/>
+              <a:rPr lang="en-US" altLang="en-UG" dirty="0"/>
               <a:t>  Slide</a:t>
             </a:r>
             <a:r>
-              <a:rPr lang="en-US" altLang="en-UG" b="1">
+              <a:rPr lang="en-US" altLang="en-UG" b="1" dirty="0">
                 <a:effectLst>
                   <a:outerShdw blurRad="38100" dist="38100" dir="2700000" algn="tl">
                     <a:srgbClr val="FFFFFF"/>
@@ -3984,11 +3981,11 @@
               <a:t> </a:t>
             </a:r>
             <a:fld id="{1C4BC210-7EA5-4C0F-AD45-5AE9BB47700C}" type="slidenum">
-              <a:rPr lang="en-US" altLang="en-UG"/>
+              <a:rPr lang="en-US" altLang="en-UG" smtClean="0"/>
               <a:pPr/>
               <a:t>‹#›</a:t>
             </a:fld>
-            <a:endParaRPr lang="en-US" altLang="en-UG"/>
+            <a:endParaRPr lang="en-US" altLang="en-UG" sz="1800" dirty="0"/>
           </a:p>
         </p:txBody>
       </p:sp>
@@ -4201,16 +4198,16 @@
           <a:bodyPr/>
           <a:lstStyle>
             <a:lvl1pPr>
-              <a:defRPr/>
+              <a:defRPr sz="1800"/>
             </a:lvl1pPr>
           </a:lstStyle>
           <a:p>
             <a:r>
-              <a:rPr lang="en-US" altLang="en-UG"/>
+              <a:rPr lang="en-US" altLang="en-UG" dirty="0"/>
               <a:t>  Slide</a:t>
             </a:r>
             <a:r>
-              <a:rPr lang="en-US" altLang="en-UG" b="1">
+              <a:rPr lang="en-US" altLang="en-UG" b="1" dirty="0">
                 <a:effectLst>
                   <a:outerShdw blurRad="38100" dist="38100" dir="2700000" algn="tl">
                     <a:srgbClr val="FFFFFF"/>
@@ -4220,11 +4217,11 @@
               <a:t> </a:t>
             </a:r>
             <a:fld id="{182EEFDC-B650-41B7-9366-DE22AEB01362}" type="slidenum">
-              <a:rPr lang="en-US" altLang="en-UG"/>
+              <a:rPr lang="en-US" altLang="en-UG" smtClean="0"/>
               <a:pPr/>
               <a:t>‹#›</a:t>
             </a:fld>
-            <a:endParaRPr lang="en-US" altLang="en-UG"/>
+            <a:endParaRPr lang="en-US" altLang="en-UG" sz="1800" dirty="0"/>
           </a:p>
         </p:txBody>
       </p:sp>
@@ -4388,14 +4385,18 @@
         <p:spPr/>
         <p:txBody>
           <a:bodyPr/>
-          <a:lstStyle/>
-          <a:p>
-            <a:r>
-              <a:rPr lang="en-US" altLang="en-UG"/>
+          <a:lstStyle>
+            <a:lvl1pPr>
+              <a:defRPr sz="1800"/>
+            </a:lvl1pPr>
+          </a:lstStyle>
+          <a:p>
+            <a:r>
+              <a:rPr lang="en-US" altLang="en-UG" dirty="0"/>
               <a:t>  Slide</a:t>
             </a:r>
             <a:r>
-              <a:rPr lang="en-US" altLang="en-UG" b="1">
+              <a:rPr lang="en-US" altLang="en-UG" b="1" dirty="0">
                 <a:effectLst>
                   <a:outerShdw blurRad="38100" dist="38100" dir="2700000" algn="tl">
                     <a:srgbClr val="FFFFFF"/>
@@ -4409,7 +4410,7 @@
               <a:pPr/>
               <a:t>‹#›</a:t>
             </a:fld>
-            <a:endParaRPr lang="en-US" altLang="en-UG"/>
+            <a:endParaRPr lang="en-US" altLang="en-UG" sz="1800" dirty="0"/>
           </a:p>
         </p:txBody>
       </p:sp>
@@ -4663,16 +4664,16 @@
           <a:bodyPr/>
           <a:lstStyle>
             <a:lvl1pPr>
-              <a:defRPr/>
+              <a:defRPr sz="1800"/>
             </a:lvl1pPr>
           </a:lstStyle>
           <a:p>
             <a:r>
-              <a:rPr lang="en-US" altLang="en-UG"/>
+              <a:rPr lang="en-US" altLang="en-UG" dirty="0"/>
               <a:t>  Slide</a:t>
             </a:r>
             <a:r>
-              <a:rPr lang="en-US" altLang="en-UG" b="1">
+              <a:rPr lang="en-US" altLang="en-UG" b="1" dirty="0">
                 <a:effectLst>
                   <a:outerShdw blurRad="38100" dist="38100" dir="2700000" algn="tl">
                     <a:srgbClr val="FFFFFF"/>
@@ -4682,11 +4683,11 @@
               <a:t> </a:t>
             </a:r>
             <a:fld id="{41FDE60B-41D3-4066-92AC-8665FF8CB5B0}" type="slidenum">
-              <a:rPr lang="en-US" altLang="en-UG"/>
+              <a:rPr lang="en-US" altLang="en-UG" smtClean="0"/>
               <a:pPr/>
               <a:t>‹#›</a:t>
             </a:fld>
-            <a:endParaRPr lang="en-US" altLang="en-UG"/>
+            <a:endParaRPr lang="en-US" altLang="en-UG" sz="1800" dirty="0"/>
           </a:p>
         </p:txBody>
       </p:sp>
@@ -4957,7 +4958,7 @@
           <a:bodyPr/>
           <a:lstStyle>
             <a:lvl1pPr>
-              <a:defRPr/>
+              <a:defRPr sz="1800"/>
             </a:lvl1pPr>
           </a:lstStyle>
           <a:p>
@@ -4976,11 +4977,11 @@
               <a:t> </a:t>
             </a:r>
             <a:fld id="{CE7537B9-0BA9-4794-9A26-262DC9F881AD}" type="slidenum">
-              <a:rPr lang="en-US" altLang="en-UG"/>
+              <a:rPr lang="en-US" altLang="en-UG" smtClean="0"/>
               <a:pPr/>
               <a:t>‹#›</a:t>
             </a:fld>
-            <a:endParaRPr lang="en-US" altLang="en-UG" dirty="0"/>
+            <a:endParaRPr lang="en-US" altLang="en-UG" sz="1800" dirty="0"/>
           </a:p>
         </p:txBody>
       </p:sp>
@@ -5398,16 +5399,16 @@
           <a:bodyPr/>
           <a:lstStyle>
             <a:lvl1pPr>
-              <a:defRPr/>
+              <a:defRPr sz="1800"/>
             </a:lvl1pPr>
           </a:lstStyle>
           <a:p>
             <a:r>
-              <a:rPr lang="en-US" altLang="en-UG"/>
+              <a:rPr lang="en-US" altLang="en-UG" dirty="0"/>
               <a:t>  Slide</a:t>
             </a:r>
             <a:r>
-              <a:rPr lang="en-US" altLang="en-UG" b="1">
+              <a:rPr lang="en-US" altLang="en-UG" b="1" dirty="0">
                 <a:effectLst>
                   <a:outerShdw blurRad="38100" dist="38100" dir="2700000" algn="tl">
                     <a:srgbClr val="FFFFFF"/>
@@ -5417,11 +5418,11 @@
               <a:t> </a:t>
             </a:r>
             <a:fld id="{F9D66D36-0F71-425A-B9F3-818A01125D51}" type="slidenum">
-              <a:rPr lang="en-US" altLang="en-UG"/>
+              <a:rPr lang="en-US" altLang="en-UG" smtClean="0"/>
               <a:pPr/>
               <a:t>‹#›</a:t>
             </a:fld>
-            <a:endParaRPr lang="en-US" altLang="en-UG"/>
+            <a:endParaRPr lang="en-US" altLang="en-UG" sz="1800" dirty="0"/>
           </a:p>
         </p:txBody>
       </p:sp>
@@ -5566,16 +5567,16 @@
           <a:bodyPr/>
           <a:lstStyle>
             <a:lvl1pPr>
-              <a:defRPr/>
+              <a:defRPr sz="1800"/>
             </a:lvl1pPr>
           </a:lstStyle>
           <a:p>
             <a:r>
-              <a:rPr lang="en-US" altLang="en-UG"/>
+              <a:rPr lang="en-US" altLang="en-UG" dirty="0"/>
               <a:t>  Slide</a:t>
             </a:r>
             <a:r>
-              <a:rPr lang="en-US" altLang="en-UG" b="1">
+              <a:rPr lang="en-US" altLang="en-UG" b="1" dirty="0">
                 <a:effectLst>
                   <a:outerShdw blurRad="38100" dist="38100" dir="2700000" algn="tl">
                     <a:srgbClr val="FFFFFF"/>
@@ -5585,11 +5586,11 @@
               <a:t> </a:t>
             </a:r>
             <a:fld id="{FD9CE47C-F90A-4653-9AF7-B918EDBB8A77}" type="slidenum">
-              <a:rPr lang="en-US" altLang="en-UG"/>
+              <a:rPr lang="en-US" altLang="en-UG" smtClean="0"/>
               <a:pPr/>
               <a:t>‹#›</a:t>
             </a:fld>
-            <a:endParaRPr lang="en-US" altLang="en-UG"/>
+            <a:endParaRPr lang="en-US" altLang="en-UG" sz="1800" dirty="0"/>
           </a:p>
         </p:txBody>
       </p:sp>
@@ -5705,16 +5706,16 @@
           <a:bodyPr/>
           <a:lstStyle>
             <a:lvl1pPr>
-              <a:defRPr/>
+              <a:defRPr sz="1800"/>
             </a:lvl1pPr>
           </a:lstStyle>
           <a:p>
             <a:r>
-              <a:rPr lang="en-US" altLang="en-UG"/>
+              <a:rPr lang="en-US" altLang="en-UG" dirty="0"/>
               <a:t>  Slide</a:t>
             </a:r>
             <a:r>
-              <a:rPr lang="en-US" altLang="en-UG" b="1">
+              <a:rPr lang="en-US" altLang="en-UG" b="1" dirty="0">
                 <a:effectLst>
                   <a:outerShdw blurRad="38100" dist="38100" dir="2700000" algn="tl">
                     <a:srgbClr val="FFFFFF"/>
@@ -5724,11 +5725,11 @@
               <a:t> </a:t>
             </a:r>
             <a:fld id="{D32CA754-6AA2-4E16-AB0A-63CCF004AE45}" type="slidenum">
-              <a:rPr lang="en-US" altLang="en-UG"/>
+              <a:rPr lang="en-US" altLang="en-UG" smtClean="0"/>
               <a:pPr/>
               <a:t>‹#›</a:t>
             </a:fld>
-            <a:endParaRPr lang="en-US" altLang="en-UG"/>
+            <a:endParaRPr lang="en-US" altLang="en-UG" sz="1800" dirty="0"/>
           </a:p>
         </p:txBody>
       </p:sp>
@@ -6044,16 +6045,16 @@
           <a:bodyPr/>
           <a:lstStyle>
             <a:lvl1pPr>
-              <a:defRPr/>
+              <a:defRPr sz="1800"/>
             </a:lvl1pPr>
           </a:lstStyle>
           <a:p>
             <a:r>
-              <a:rPr lang="en-US" altLang="en-UG"/>
+              <a:rPr lang="en-US" altLang="en-UG" dirty="0"/>
               <a:t>  Slide</a:t>
             </a:r>
             <a:r>
-              <a:rPr lang="en-US" altLang="en-UG" b="1">
+              <a:rPr lang="en-US" altLang="en-UG" b="1" dirty="0">
                 <a:effectLst>
                   <a:outerShdw blurRad="38100" dist="38100" dir="2700000" algn="tl">
                     <a:srgbClr val="FFFFFF"/>
@@ -6063,11 +6064,11 @@
               <a:t> </a:t>
             </a:r>
             <a:fld id="{92DDF584-C563-4AF3-9C85-74AE268379EC}" type="slidenum">
-              <a:rPr lang="en-US" altLang="en-UG"/>
+              <a:rPr lang="en-US" altLang="en-UG" smtClean="0"/>
               <a:pPr/>
               <a:t>‹#›</a:t>
             </a:fld>
-            <a:endParaRPr lang="en-US" altLang="en-UG"/>
+            <a:endParaRPr lang="en-US" altLang="en-UG" sz="1800" dirty="0"/>
           </a:p>
         </p:txBody>
       </p:sp>
@@ -6359,16 +6360,16 @@
           <a:bodyPr/>
           <a:lstStyle>
             <a:lvl1pPr>
-              <a:defRPr/>
+              <a:defRPr sz="1800"/>
             </a:lvl1pPr>
           </a:lstStyle>
           <a:p>
             <a:r>
-              <a:rPr lang="en-US" altLang="en-UG"/>
+              <a:rPr lang="en-US" altLang="en-UG" dirty="0"/>
               <a:t>  Slide</a:t>
             </a:r>
             <a:r>
-              <a:rPr lang="en-US" altLang="en-UG" b="1">
+              <a:rPr lang="en-US" altLang="en-UG" b="1" dirty="0">
                 <a:effectLst>
                   <a:outerShdw blurRad="38100" dist="38100" dir="2700000" algn="tl">
                     <a:srgbClr val="FFFFFF"/>
@@ -6378,11 +6379,11 @@
               <a:t> </a:t>
             </a:r>
             <a:fld id="{1F8DE97C-F3F8-4995-ABC1-945329C93974}" type="slidenum">
-              <a:rPr lang="en-US" altLang="en-UG"/>
+              <a:rPr lang="en-US" altLang="en-UG" smtClean="0"/>
               <a:pPr/>
               <a:t>‹#›</a:t>
             </a:fld>
-            <a:endParaRPr lang="en-US" altLang="en-UG"/>
+            <a:endParaRPr lang="en-US" altLang="en-UG" sz="1800" dirty="0"/>
           </a:p>
         </p:txBody>
       </p:sp>
@@ -6869,7 +6870,7 @@
           <a:p>
             <a:pPr algn="r"/>
             <a:r>
-              <a:rPr lang="en-US" altLang="en-UG" dirty="0">
+              <a:rPr lang="en-US" altLang="en-UG" sz="1800" dirty="0">
                 <a:solidFill>
                   <a:srgbClr val="E0EDF0"/>
                 </a:solidFill>
@@ -6951,11 +6952,15 @@
           </a:lstStyle>
           <a:p>
             <a:r>
-              <a:rPr lang="en-US" altLang="en-UG"/>
-              <a:t>  Slide</a:t>
-            </a:r>
-            <a:r>
-              <a:rPr lang="en-US" altLang="en-UG" b="1">
+              <a:rPr lang="en-US" altLang="en-UG" dirty="0"/>
+              <a:t>  </a:t>
+            </a:r>
+            <a:r>
+              <a:rPr lang="en-US" altLang="en-UG" sz="1800" dirty="0"/>
+              <a:t>Slide</a:t>
+            </a:r>
+            <a:r>
+              <a:rPr lang="en-US" altLang="en-UG" sz="1800" b="1" dirty="0">
                 <a:effectLst>
                   <a:outerShdw blurRad="38100" dist="38100" dir="2700000" algn="tl">
                     <a:srgbClr val="FFFFFF"/>
@@ -6965,11 +6970,11 @@
               <a:t> </a:t>
             </a:r>
             <a:fld id="{123AB89C-1184-422F-A25B-A3C3FCC3E457}" type="slidenum">
-              <a:rPr lang="en-US" altLang="en-UG"/>
+              <a:rPr lang="en-US" altLang="en-UG" sz="1800" smtClean="0"/>
               <a:pPr/>
               <a:t>‹#›</a:t>
             </a:fld>
-            <a:endParaRPr lang="en-US" altLang="en-UG"/>
+            <a:endParaRPr lang="en-US" altLang="en-UG" sz="1800" dirty="0"/>
           </a:p>
         </p:txBody>
       </p:sp>
@@ -8121,7 +8126,7 @@
         </p:blipFill>
         <p:spPr bwMode="auto">
           <a:xfrm>
-            <a:off x="6781800" y="533400"/>
+            <a:off x="6781800" y="556507"/>
             <a:ext cx="1989894" cy="2110493"/>
           </a:xfrm>
           <a:prstGeom prst="roundRect">
@@ -13963,7 +13968,7 @@
           <a:p>
             <a:r>
               <a:rPr lang="en-US" altLang="en-UG" dirty="0"/>
-              <a:t>  Slide 14</a:t>
+              <a:t>  Slide 17</a:t>
             </a:r>
           </a:p>
         </p:txBody>
@@ -14771,7 +14776,7 @@
           <a:p>
             <a:r>
               <a:rPr lang="en-US" altLang="en-UG" dirty="0"/>
-              <a:t>  Slide 14</a:t>
+              <a:t>  Slide 18</a:t>
             </a:r>
           </a:p>
         </p:txBody>
@@ -15883,7 +15888,7 @@
           <a:p>
             <a:r>
               <a:rPr lang="en-US" altLang="en-UG" dirty="0"/>
-              <a:t>  Slide 14</a:t>
+              <a:t>  Slide 19</a:t>
             </a:r>
           </a:p>
         </p:txBody>
@@ -16274,7 +16279,7 @@
           <a:p>
             <a:r>
               <a:rPr lang="en-US" altLang="en-UG" dirty="0"/>
-              <a:t>  Slide 14</a:t>
+              <a:t>  Slide 20</a:t>
             </a:r>
           </a:p>
         </p:txBody>
@@ -16911,7 +16916,7 @@
           <a:p>
             <a:r>
               <a:rPr lang="en-US" altLang="en-UG" dirty="0"/>
-              <a:t>  Slide 15</a:t>
+              <a:t>  Slide 21</a:t>
             </a:r>
           </a:p>
         </p:txBody>
@@ -17670,7 +17675,7 @@
           <a:p>
             <a:r>
               <a:rPr lang="en-US" altLang="en-UG" dirty="0"/>
-              <a:t>  Slide 9</a:t>
+              <a:t>  Slide 22</a:t>
             </a:r>
           </a:p>
         </p:txBody>
@@ -17846,7 +17851,7 @@
           <a:p>
             <a:r>
               <a:rPr lang="en-US" altLang="en-UG" dirty="0"/>
-              <a:t>  Slide 9</a:t>
+              <a:t>  Slide 23</a:t>
             </a:r>
           </a:p>
         </p:txBody>
@@ -18305,7 +18310,7 @@
           <a:p>
             <a:r>
               <a:rPr lang="en-US" altLang="en-UG" dirty="0"/>
-              <a:t>  Slide 9</a:t>
+              <a:t>  Slide 24</a:t>
             </a:r>
           </a:p>
         </p:txBody>
@@ -18511,7 +18516,7 @@
           <a:p>
             <a:r>
               <a:rPr lang="en-US" altLang="en-UG" dirty="0"/>
-              <a:t>  Slide 9</a:t>
+              <a:t>  Slide 25</a:t>
             </a:r>
           </a:p>
         </p:txBody>
@@ -19210,7 +19215,7 @@
           <a:p>
             <a:r>
               <a:rPr lang="en-US" altLang="en-UG" dirty="0"/>
-              <a:t>  Slide 15</a:t>
+              <a:t>  Slide 26</a:t>
             </a:r>
           </a:p>
         </p:txBody>
@@ -19618,7 +19623,7 @@
           <a:p>
             <a:r>
               <a:rPr lang="en-US" altLang="en-UG" dirty="0"/>
-              <a:t>  Slide 9</a:t>
+              <a:t>  Slide 27</a:t>
             </a:r>
           </a:p>
         </p:txBody>
@@ -20356,7 +20361,7 @@
           <a:p>
             <a:r>
               <a:rPr lang="en-US" altLang="en-UG" dirty="0"/>
-              <a:t>  Slide 9</a:t>
+              <a:t>  Slide 28</a:t>
             </a:r>
           </a:p>
         </p:txBody>
@@ -22102,7 +22107,7 @@
           <a:p>
             <a:r>
               <a:rPr lang="en-US" altLang="en-UG" dirty="0"/>
-              <a:t>  Slide 15</a:t>
+              <a:t>  Slide 29</a:t>
             </a:r>
           </a:p>
         </p:txBody>
@@ -22506,7 +22511,7 @@
           <a:p>
             <a:r>
               <a:rPr lang="en-US" altLang="en-UG" dirty="0"/>
-              <a:t>  Slide 9</a:t>
+              <a:t>  Slide 30</a:t>
             </a:r>
           </a:p>
         </p:txBody>
@@ -23244,7 +23249,7 @@
           <a:p>
             <a:r>
               <a:rPr lang="en-US" altLang="en-UG" dirty="0"/>
-              <a:t>  Slide 9</a:t>
+              <a:t>  Slide 31</a:t>
             </a:r>
           </a:p>
         </p:txBody>
@@ -23602,6 +23607,245 @@
     <p:extLst>
       <p:ext uri="{BB962C8B-B14F-4D97-AF65-F5344CB8AC3E}">
         <p14:creationId xmlns:p14="http://schemas.microsoft.com/office/powerpoint/2010/main" val="7102917"/>
+      </p:ext>
+    </p:extLst>
+  </p:cSld>
+  <p:clrMapOvr>
+    <a:masterClrMapping/>
+  </p:clrMapOvr>
+  <p:transition spd="med">
+    <p:cover dir="u"/>
+  </p:transition>
+</p:sld>
+</file>
+
+<file path=ppt/slides/slide33.xml><?xml version="1.0" encoding="utf-8"?>
+<p:sld xmlns:a="http://schemas.openxmlformats.org/drawingml/2006/main" xmlns:r="http://schemas.openxmlformats.org/officeDocument/2006/relationships" xmlns:p="http://schemas.openxmlformats.org/presentationml/2006/main">
+  <p:cSld>
+    <p:spTree>
+      <p:nvGrpSpPr>
+        <p:cNvPr id="1" name="">
+          <a:extLst>
+            <a:ext uri="{FF2B5EF4-FFF2-40B4-BE49-F238E27FC236}">
+              <a16:creationId xmlns:a16="http://schemas.microsoft.com/office/drawing/2014/main" id="{89FEB1AE-B8A1-014E-FAB0-85D9454372F2}"/>
+            </a:ext>
+          </a:extLst>
+        </p:cNvPr>
+        <p:cNvGrpSpPr/>
+        <p:nvPr/>
+      </p:nvGrpSpPr>
+      <p:grpSpPr>
+        <a:xfrm>
+          <a:off x="0" y="0"/>
+          <a:ext cx="0" cy="0"/>
+          <a:chOff x="0" y="0"/>
+          <a:chExt cx="0" cy="0"/>
+        </a:xfrm>
+      </p:grpSpPr>
+      <p:sp>
+        <p:nvSpPr>
+          <p:cNvPr id="2" name="Title 1">
+            <a:extLst>
+              <a:ext uri="{FF2B5EF4-FFF2-40B4-BE49-F238E27FC236}">
+                <a16:creationId xmlns:a16="http://schemas.microsoft.com/office/drawing/2014/main" id="{EA703C6E-1087-CF1D-1F24-06986CD4577D}"/>
+              </a:ext>
+            </a:extLst>
+          </p:cNvPr>
+          <p:cNvSpPr>
+            <a:spLocks noGrp="1"/>
+          </p:cNvSpPr>
+          <p:nvPr>
+            <p:ph type="title"/>
+          </p:nvPr>
+        </p:nvSpPr>
+        <p:spPr>
+          <a:xfrm>
+            <a:off x="533400" y="1905000"/>
+            <a:ext cx="8229600" cy="685800"/>
+          </a:xfrm>
+        </p:spPr>
+        <p:txBody>
+          <a:bodyPr/>
+          <a:lstStyle/>
+          <a:p>
+            <a:pPr algn="ctr"/>
+            <a:r>
+              <a:rPr lang="en-US" dirty="0"/>
+              <a:t>END</a:t>
+            </a:r>
+            <a:endParaRPr lang="en-UG" dirty="0"/>
+          </a:p>
+        </p:txBody>
+      </p:sp>
+      <p:sp>
+        <p:nvSpPr>
+          <p:cNvPr id="4" name="Slide Number Placeholder 3">
+            <a:extLst>
+              <a:ext uri="{FF2B5EF4-FFF2-40B4-BE49-F238E27FC236}">
+                <a16:creationId xmlns:a16="http://schemas.microsoft.com/office/drawing/2014/main" id="{DFD347C5-D55C-7EB5-3CC5-C4B18D61E425}"/>
+              </a:ext>
+            </a:extLst>
+          </p:cNvPr>
+          <p:cNvSpPr>
+            <a:spLocks noGrp="1"/>
+          </p:cNvSpPr>
+          <p:nvPr>
+            <p:ph type="sldNum" sz="quarter" idx="12"/>
+          </p:nvPr>
+        </p:nvSpPr>
+        <p:spPr>
+          <a:xfrm>
+            <a:off x="0" y="6397625"/>
+            <a:ext cx="2011363" cy="457200"/>
+          </a:xfrm>
+        </p:spPr>
+        <p:txBody>
+          <a:bodyPr/>
+          <a:lstStyle/>
+          <a:p>
+            <a:r>
+              <a:rPr lang="en-US" altLang="en-UG" dirty="0"/>
+              <a:t>  Slide 32</a:t>
+            </a:r>
+          </a:p>
+        </p:txBody>
+      </p:sp>
+      <p:sp>
+        <p:nvSpPr>
+          <p:cNvPr id="7" name="TextBox 6">
+            <a:extLst>
+              <a:ext uri="{FF2B5EF4-FFF2-40B4-BE49-F238E27FC236}">
+                <a16:creationId xmlns:a16="http://schemas.microsoft.com/office/drawing/2014/main" id="{48B22073-C2E9-B09E-8881-8E198CBC2A43}"/>
+              </a:ext>
+            </a:extLst>
+          </p:cNvPr>
+          <p:cNvSpPr txBox="1"/>
+          <p:nvPr/>
+        </p:nvSpPr>
+        <p:spPr>
+          <a:xfrm>
+            <a:off x="2133600" y="5181600"/>
+            <a:ext cx="6705600" cy="615553"/>
+          </a:xfrm>
+          <a:prstGeom prst="rect">
+            <a:avLst/>
+          </a:prstGeom>
+          <a:noFill/>
+        </p:spPr>
+        <p:txBody>
+          <a:bodyPr wrap="square">
+            <a:spAutoFit/>
+          </a:bodyPr>
+          <a:lstStyle/>
+          <a:p>
+            <a:r>
+              <a:rPr lang="en-UG" sz="1700" dirty="0">
+                <a:hlinkClick r:id="rId2"/>
+              </a:rPr>
+              <a:t>https://github.com/Ainedembe-Denis/Systems-Programing---C-PROJECTS</a:t>
+            </a:r>
+            <a:r>
+              <a:rPr lang="en-US" sz="1700" dirty="0"/>
+              <a:t> </a:t>
+            </a:r>
+            <a:endParaRPr lang="en-UG" sz="1700" dirty="0"/>
+          </a:p>
+        </p:txBody>
+      </p:sp>
+      <p:sp>
+        <p:nvSpPr>
+          <p:cNvPr id="9" name="TextBox 8">
+            <a:extLst>
+              <a:ext uri="{FF2B5EF4-FFF2-40B4-BE49-F238E27FC236}">
+                <a16:creationId xmlns:a16="http://schemas.microsoft.com/office/drawing/2014/main" id="{0FB8E708-46B3-5301-BD95-14558F3635F3}"/>
+              </a:ext>
+            </a:extLst>
+          </p:cNvPr>
+          <p:cNvSpPr txBox="1"/>
+          <p:nvPr/>
+        </p:nvSpPr>
+        <p:spPr>
+          <a:xfrm>
+            <a:off x="2189480" y="2971800"/>
+            <a:ext cx="3794760" cy="1938992"/>
+          </a:xfrm>
+          <a:prstGeom prst="rect">
+            <a:avLst/>
+          </a:prstGeom>
+          <a:noFill/>
+        </p:spPr>
+        <p:txBody>
+          <a:bodyPr wrap="square">
+            <a:spAutoFit/>
+          </a:bodyPr>
+          <a:lstStyle/>
+          <a:p>
+            <a:pPr fontAlgn="ctr"/>
+            <a:r>
+              <a:rPr lang="en-CA" sz="2400" b="1" i="0" u="none" strike="noStrike" dirty="0">
+                <a:solidFill>
+                  <a:schemeClr val="tx1"/>
+                </a:solidFill>
+                <a:effectLst/>
+                <a:latin typeface="Times New Roman" panose="02020603050405020304" pitchFamily="18" charset="0"/>
+              </a:rPr>
+              <a:t>STUDENT </a:t>
+            </a:r>
+          </a:p>
+          <a:p>
+            <a:pPr marL="342900" indent="-342900" fontAlgn="ctr">
+              <a:buFont typeface="Arial" panose="020B0604020202020204" pitchFamily="34" charset="0"/>
+              <a:buChar char="•"/>
+            </a:pPr>
+            <a:r>
+              <a:rPr lang="en-CA" sz="2400" i="0" u="none" strike="noStrike" dirty="0">
+                <a:solidFill>
+                  <a:schemeClr val="tx1"/>
+                </a:solidFill>
+                <a:effectLst/>
+                <a:latin typeface="Times New Roman" panose="02020603050405020304" pitchFamily="18" charset="0"/>
+              </a:rPr>
+              <a:t>Ainedembe Denis</a:t>
+            </a:r>
+          </a:p>
+          <a:p>
+            <a:pPr marL="342900" indent="-342900" fontAlgn="ctr">
+              <a:buFont typeface="Arial" panose="020B0604020202020204" pitchFamily="34" charset="0"/>
+              <a:buChar char="•"/>
+            </a:pPr>
+            <a:endParaRPr lang="en-CA" b="1" dirty="0"/>
+          </a:p>
+          <a:p>
+            <a:pPr fontAlgn="ctr"/>
+            <a:r>
+              <a:rPr lang="en-CA" b="1" dirty="0"/>
+              <a:t>LECTURER </a:t>
+            </a:r>
+          </a:p>
+          <a:p>
+            <a:pPr marL="342900" indent="-342900" fontAlgn="ctr">
+              <a:buFont typeface="Arial" panose="020B0604020202020204" pitchFamily="34" charset="0"/>
+              <a:buChar char="•"/>
+            </a:pPr>
+            <a:r>
+              <a:rPr lang="en-CA" dirty="0"/>
+              <a:t>Dr. </a:t>
+            </a:r>
+            <a:r>
+              <a:rPr lang="en-CA" dirty="0" err="1"/>
+              <a:t>Wauyo</a:t>
+            </a:r>
+            <a:r>
+              <a:rPr lang="en-CA" dirty="0"/>
+              <a:t> Fred</a:t>
+            </a:r>
+          </a:p>
+        </p:txBody>
+      </p:sp>
+    </p:spTree>
+    <p:extLst>
+      <p:ext uri="{BB962C8B-B14F-4D97-AF65-F5344CB8AC3E}">
+        <p14:creationId xmlns:p14="http://schemas.microsoft.com/office/powerpoint/2010/main" val="4084543074"/>
       </p:ext>
     </p:extLst>
   </p:cSld>
@@ -27081,36 +27325,6 @@
           </a:p>
         </p:txBody>
       </p:sp>
-      <p:pic>
-        <p:nvPicPr>
-          <p:cNvPr id="5" name="Picture 4">
-            <a:extLst>
-              <a:ext uri="{FF2B5EF4-FFF2-40B4-BE49-F238E27FC236}">
-                <a16:creationId xmlns:a16="http://schemas.microsoft.com/office/drawing/2014/main" id="{DB27E39E-B7CB-5034-D1D3-89A6C17A689B}"/>
-              </a:ext>
-            </a:extLst>
-          </p:cNvPr>
-          <p:cNvPicPr>
-            <a:picLocks noChangeAspect="1"/>
-          </p:cNvPicPr>
-          <p:nvPr/>
-        </p:nvPicPr>
-        <p:blipFill>
-          <a:blip r:embed="rId3"/>
-          <a:stretch>
-            <a:fillRect/>
-          </a:stretch>
-        </p:blipFill>
-        <p:spPr>
-          <a:xfrm>
-            <a:off x="5076" y="3944168"/>
-            <a:ext cx="1442724" cy="932632"/>
-          </a:xfrm>
-          <a:prstGeom prst="rect">
-            <a:avLst/>
-          </a:prstGeom>
-        </p:spPr>
-      </p:pic>
     </p:spTree>
     <p:extLst>
       <p:ext uri="{BB962C8B-B14F-4D97-AF65-F5344CB8AC3E}">
